--- a/deliverables/个人财务管理与可视化看板-答辩演示.pptx
+++ b/deliverables/个人财务管理与可视化看板-答辩演示.pptx
@@ -2037,45 +2037,75 @@
         </p:nvSpPr>
         <p:spPr>
           <a:xfrm>
-            <a:off x="804672" y="5257800"/>
-            <a:ext cx="6217920" cy="685800"/>
-          </a:xfrm>
-          <a:prstGeom prst="rect">
-            <a:avLst/>
-          </a:prstGeom>
-          <a:noFill/>
-          <a:ln/>
-        </p:spPr>
-        <p:txBody>
-          <a:bodyPr wrap="square" lIns="0" tIns="0" rIns="0" bIns="0" rtlCol="0" anchor="ctr"/>
-          <a:lstStyle/>
-          <a:p>
-            <a:pPr indent="0" marL="0">
-              <a:buNone/>
-            </a:pPr>
-            <a:r>
-              <a:rPr lang="en-US" sz="1200" dirty="0">
+            <a:off x="804672" y="4736592"/>
+            <a:ext cx="6537960" cy="1115568"/>
+          </a:xfrm>
+          <a:prstGeom prst="rect">
+            <a:avLst/>
+          </a:prstGeom>
+          <a:noFill/>
+          <a:ln/>
+        </p:spPr>
+        <p:txBody>
+          <a:bodyPr wrap="square" lIns="0" tIns="0" rIns="0" bIns="0" rtlCol="0" anchor="ctr">
+            <a:normAutofit/>
+          </a:bodyPr>
+          <a:lstStyle/>
+          <a:p>
+            <a:pPr indent="0" marL="0">
+              <a:buNone/>
+            </a:pPr>
+            <a:r>
+              <a:rPr lang="en-US" sz="1050" dirty="0">
                 <a:solidFill>
                   <a:srgbClr val="B9CAD5"/>
                 </a:solidFill>
               </a:rPr>
-              <a:t>姓名：【请填写】   学号：【请填写】</a:t>
-            </a:r>
-            <a:endParaRPr lang="en-US" sz="1200" dirty="0"/>
-          </a:p>
-          <a:p>
-            <a:pPr indent="0" marL="0">
-              <a:buNone/>
-            </a:pPr>
-            <a:r>
-              <a:rPr lang="en-US" sz="1200" dirty="0">
+              <a:t>小组成员</a:t>
+            </a:r>
+            <a:endParaRPr lang="en-US" sz="1050" dirty="0"/>
+          </a:p>
+          <a:p>
+            <a:pPr indent="0" marL="0">
+              <a:buNone/>
+            </a:pPr>
+            <a:r>
+              <a:rPr lang="en-US" sz="1050" dirty="0">
                 <a:solidFill>
                   <a:srgbClr val="B9CAD5"/>
                 </a:solidFill>
               </a:rPr>
+              <a:t>蓝思钰 52302042011 · 姜萱萱 52302042008 · 刘晓盼 52302042019</a:t>
+            </a:r>
+            <a:endParaRPr lang="en-US" sz="1050" dirty="0"/>
+          </a:p>
+          <a:p>
+            <a:pPr indent="0" marL="0">
+              <a:buNone/>
+            </a:pPr>
+            <a:r>
+              <a:rPr lang="en-US" sz="1050" dirty="0">
+                <a:solidFill>
+                  <a:srgbClr val="B9CAD5"/>
+                </a:solidFill>
+              </a:rPr>
+              <a:t>王晨 52302042035 · 朱婷婷 52302042055</a:t>
+            </a:r>
+            <a:endParaRPr lang="en-US" sz="1050" dirty="0"/>
+          </a:p>
+          <a:p>
+            <a:pPr indent="0" marL="0">
+              <a:buNone/>
+            </a:pPr>
+            <a:r>
+              <a:rPr lang="en-US" sz="1050" dirty="0">
+                <a:solidFill>
+                  <a:srgbClr val="B9CAD5"/>
+                </a:solidFill>
+              </a:rPr>
               <a:t>班级：【请填写】   指导教师：【请填写】</a:t>
             </a:r>
-            <a:endParaRPr lang="en-US" sz="1200" dirty="0"/>
+            <a:endParaRPr lang="en-US" sz="1050" dirty="0"/>
           </a:p>
         </p:txBody>
       </p:sp>
@@ -3444,7 +3474,7 @@
         <p:spPr>
           <a:xfrm>
             <a:off x="850392" y="5870448"/>
-            <a:ext cx="3657600" cy="228600"/>
+            <a:ext cx="5303520" cy="228600"/>
           </a:xfrm>
           <a:prstGeom prst="rect">
             <a:avLst/>
@@ -3460,14 +3490,14 @@
               <a:buNone/>
             </a:pPr>
             <a:r>
-              <a:rPr lang="en-US" sz="1000" dirty="0">
+              <a:rPr lang="en-US" sz="900" dirty="0">
                 <a:solidFill>
                   <a:srgbClr val="8EA4B5"/>
                 </a:solidFill>
               </a:rPr>
-              <a:t>【请填写姓名】 · 2026</a:t>
-            </a:r>
-            <a:endParaRPr lang="en-US" sz="1000" dirty="0"/>
+              <a:t>蓝思钰 · 姜萱萱 · 刘晓盼 · 王晨 · 朱婷婷 · 2026</a:t>
+            </a:r>
+            <a:endParaRPr lang="en-US" sz="900" dirty="0"/>
           </a:p>
         </p:txBody>
       </p:sp>

--- a/deliverables/个人财务管理与可视化看板-答辩演示.pptx
+++ b/deliverables/个人财务管理与可视化看板-答辩演示.pptx
@@ -2103,7 +2103,7 @@
                   <a:srgbClr val="B9CAD5"/>
                 </a:solidFill>
               </a:rPr>
-              <a:t>班级：【请填写】   指导教师：【请填写】</a:t>
+              <a:t>班级：23软件工程2班   指导教师：王友</a:t>
             </a:r>
             <a:endParaRPr lang="en-US" sz="1050" dirty="0"/>
           </a:p>
@@ -2310,7 +2310,7 @@
                   <a:srgbClr val="167B68"/>
                 </a:solidFill>
               </a:rPr>
-              <a:t>32</a:t>
+              <a:t>44</a:t>
             </a:r>
             <a:endParaRPr lang="en-US" sz="4800" dirty="0"/>
           </a:p>
@@ -2382,7 +2382,7 @@
                   <a:srgbClr val="4B729B"/>
                 </a:solidFill>
               </a:rPr>
-              <a:t>4</a:t>
+              <a:t>5</a:t>
             </a:r>
             <a:endParaRPr lang="en-US" sz="4800" dirty="0"/>
           </a:p>
@@ -3104,7 +3104,7 @@
                   <a:srgbClr val="FFFFFF"/>
                 </a:solidFill>
               </a:rPr>
-              <a:t>交付：源代码 + JAR + 报告 + PPT + 测试脚本 + 提交说明</a:t>
+              <a:t>交付：源代码 + 胖 JAR + SQLite/SQL + 报告 + PPT + 测试</a:t>
             </a:r>
             <a:endParaRPr lang="en-US" sz="1300" dirty="0"/>
           </a:p>
@@ -5896,7 +5896,7 @@
                   <a:srgbClr val="687D8F"/>
                 </a:solidFill>
               </a:rPr>
-              <a:t>可替换点：localStorage → REST/数据库；Node 开发服务器 → Java 交付程序</a:t>
+              <a:t>持久化边界：JAR 模式 REST API → SQLite；Node 开发模式回退 localStorage</a:t>
             </a:r>
             <a:endParaRPr lang="en-US" sz="1300" dirty="0"/>
           </a:p>
@@ -6199,7 +6199,7 @@
                   <a:srgbClr val="687D8F"/>
                 </a:solidFill>
               </a:rPr>
-              <a:t>② 写入本地状态并持久化</a:t>
+              <a:t>② REST API 事务写入 SQLite</a:t>
             </a:r>
             <a:endParaRPr lang="en-US" sz="1300" dirty="0"/>
           </a:p>
@@ -6235,7 +6235,7 @@
                   <a:srgbClr val="687D8F"/>
                 </a:solidFill>
               </a:rPr>
-              <a:t>③ 发布 transaction:add 事件</a:t>
+              <a:t>③ 发布 transaction:added 事件</a:t>
             </a:r>
             <a:endParaRPr lang="en-US" sz="1300" dirty="0"/>
           </a:p>
@@ -8819,7 +8819,7 @@
                 <a:ea typeface="Microsoft YaHei" pitchFamily="34" charset="-122"/>
                 <a:cs typeface="Microsoft YaHei" pitchFamily="34" charset="-120"/>
               </a:rPr>
-              <a:t>只允许 GET / HEAD</a:t>
+              <a:t>静态 GET/HEAD · API GET/PUT</a:t>
             </a:r>
             <a:endParaRPr lang="en-US" sz="1150" dirty="0"/>
           </a:p>
@@ -8912,7 +8912,7 @@
                 <a:ea typeface="Microsoft YaHei" pitchFamily="34" charset="-122"/>
                 <a:cs typeface="Microsoft YaHei" pitchFamily="34" charset="-120"/>
               </a:rPr>
-              <a:t>路径安全</a:t>
+              <a:t>数据库</a:t>
             </a:r>
             <a:endParaRPr lang="en-US" sz="1600" dirty="0"/>
           </a:p>
@@ -8953,7 +8953,7 @@
                 <a:ea typeface="Microsoft YaHei" pitchFamily="34" charset="-122"/>
                 <a:cs typeface="Microsoft YaHei" pitchFamily="34" charset="-120"/>
               </a:rPr>
-              <a:t>拒绝路径穿越</a:t>
+              <a:t>SQLite 外键</a:t>
             </a:r>
             <a:endParaRPr lang="en-US" sz="1150" dirty="0"/>
           </a:p>
@@ -8970,7 +8970,7 @@
                 <a:ea typeface="Microsoft YaHei" pitchFamily="34" charset="-122"/>
                 <a:cs typeface="Microsoft YaHei" pitchFamily="34" charset="-120"/>
               </a:rPr>
-              <a:t>拒绝 .git 等隐藏目录</a:t>
+              <a:t>事务与请求体上限</a:t>
             </a:r>
             <a:endParaRPr lang="en-US" sz="1150" dirty="0"/>
           </a:p>
@@ -9308,7 +9308,7 @@
                   <a:srgbClr val="687D8F"/>
                 </a:solidFill>
               </a:rPr>
-              <a:t>边界声明：localStorage 适合课程单用户演示；产品化必须补充认证、授权、加密和备份</a:t>
+              <a:t>边界声明：SQLite 适合本机单用户演示；产品化仍需认证、授权、加密和备份</a:t>
             </a:r>
             <a:endParaRPr lang="en-US" sz="1250" dirty="0"/>
           </a:p>
